--- a/EXP-1015-06/EXP-1015-06_A4AI-제조-진출-방안과-지금-잡을-지원사업.pptx
+++ b/EXP-1015-06/EXP-1015-06_A4AI-제조-진출-방안과-지금-잡을-지원사업.pptx
@@ -193,7 +193,7 @@
                   <c:v>18</c:v>
                 </c:pt>
                 <c:pt idx="5">
-                  <c:v>5</c:v>
+                  <c:v>4</c:v>
                 </c:pt>
               </c:numCache>
             </c:numRef>
@@ -391,13 +391,13 @@
                 <c:formatCode>General</c:formatCode>
                 <c:ptCount val="4"/>
                 <c:pt idx="0">
-                  <c:v>5</c:v>
+                  <c:v>4</c:v>
                 </c:pt>
                 <c:pt idx="1">
                   <c:v>5</c:v>
                 </c:pt>
                 <c:pt idx="2">
-                  <c:v>2</c:v>
+                  <c:v>3</c:v>
                 </c:pt>
                 <c:pt idx="3">
                   <c:v>6</c:v>
@@ -4661,7 +4661,7 @@
                 </a:solidFill>
                 <a:latin typeface="Noto Sans KR"/>
               </a:rPr>
-              <a:t>현재 자격으로 5건이 바로 가능하고, 등록·파트너로 5건이 더</a:t>
+              <a:t>현재 자격으로 4건이 바로 가능하고, 등록·파트너로 5건이 더</a:t>
             </a:r>
             <a:br/>
             <a:r>
@@ -5378,7 +5378,7 @@
                 </a:solidFill>
                 <a:latin typeface="Noto Sans KR"/>
               </a:rPr>
-              <a:t>2,659건을 걸러 18건을 확인했고, 바로 가능한 공고는 5건입니다</a:t>
+              <a:t>2,659건을 걸러 18건을 확인했고, 바로 가능한 공고는 4건입니다</a:t>
             </a:r>
           </a:p>
         </p:txBody>
@@ -7280,7 +7280,7 @@
                 </a:solidFill>
                 <a:latin typeface="Noto Sans KR"/>
               </a:rPr>
-              <a:t>2,659건을 걸러 18건을 확인했고, 바로 가능한 공고는 5건입니다</a:t>
+              <a:t>2,659건을 걸러 18건을 확인했고, 바로 가능한 공고는 4건입니다</a:t>
             </a:r>
           </a:p>
         </p:txBody>
@@ -7653,7 +7653,7 @@
                 </a:solidFill>
                 <a:latin typeface="Noto Sans KR"/>
               </a:rPr>
-              <a:t>결과: 가능 5 · 조건부 5 · 확인 필요 2 · 불가 6</a:t>
+              <a:t>결과: 가능 4 · 조건부 5 · 확인 필요 3 · 불가 6</a:t>
             </a:r>
           </a:p>
         </p:txBody>
@@ -7852,7 +7852,7 @@
                 </a:solidFill>
                 <a:latin typeface="Noto Sans KR"/>
               </a:rPr>
-              <a:t>조건부 5건까지 열면, 올해 안에 도전할 공고는 10건이 됩니다</a:t>
+              <a:t>조건부 5건까지 열면, 올해 안에 도전할 공고는 9건이 됩니다</a:t>
             </a:r>
           </a:p>
         </p:txBody>
@@ -8175,7 +8175,7 @@
                 </a:solidFill>
                 <a:latin typeface="Noto Sans KR"/>
               </a:rPr>
-              <a:t>가능 5: 기술지도·경북AX랩·원스톱 에이전트·방산</a:t>
+              <a:t>가능 4: 기술지도·원스톱 에이전트·방산</a:t>
             </a:r>
             <a:br/>
             <a:r>
@@ -8185,7 +8185,7 @@
                 </a:solidFill>
                 <a:latin typeface="Noto Sans KR"/>
               </a:rPr>
-              <a:t>컨설팅·AI데이터센터</a:t>
+              <a:t>컨설팅·AI데이터센터 실증</a:t>
             </a:r>
           </a:p>
           <a:p>
@@ -8289,7 +8289,7 @@
                 </a:solidFill>
                 <a:latin typeface="Noto Sans KR"/>
               </a:rPr>
-              <a:t>확인 필요 2: 애로기술 지원 대상 범위, 스마트</a:t>
+              <a:t>확인 필요 3: 경북AX랩 접수 상태, 애로기술 대상</a:t>
             </a:r>
             <a:br/>
             <a:r>
@@ -8299,7 +8299,7 @@
                 </a:solidFill>
                 <a:latin typeface="Noto Sans KR"/>
               </a:rPr>
-              <a:t>안전장비 등록 요건</a:t>
+              <a:t>범위, 안전장비 요건</a:t>
             </a:r>
           </a:p>
           <a:p>

--- a/EXP-1015-06/EXP-1015-06_A4AI-제조-진출-방안과-지금-잡을-지원사업.pptx
+++ b/EXP-1015-06/EXP-1015-06_A4AI-제조-진출-방안과-지금-잡을-지원사업.pptx
@@ -16,6 +16,7 @@
     <p:sldId id="264" r:id="rId15"/>
     <p:sldId id="265" r:id="rId16"/>
     <p:sldId id="266" r:id="rId17"/>
+    <p:sldId id="267" r:id="rId18"/>
   </p:sldIdLst>
   <p:sldSz cx="12191999" cy="6858000" type="screen4x3"/>
   <p:notesSz cx="6858000" cy="9144000"/>
@@ -3745,7 +3746,7 @@
                 </a:solidFill>
                 <a:latin typeface="Noto Sans KR"/>
               </a:rPr>
-              <a:t>관건은 파트너이며, 민간부담금 20~25%를 미리 잡아야 합니다</a:t>
+              <a:t>10월에 문을 열고, 내년 4월까지 실적을 만든 뒤 넓힙니다</a:t>
             </a:r>
           </a:p>
         </p:txBody>
@@ -3787,7 +3788,7 @@
                 </a:solidFill>
                 <a:latin typeface="Noto Sans KR"/>
               </a:rPr>
-              <a:t>공고문 조건에서 확인한 준비물과 위험</a:t>
+              <a:t>각 단계의 할 일을 공고 마감일에 맞췄습니다</a:t>
             </a:r>
           </a:p>
         </p:txBody>
@@ -3871,27 +3872,95 @@
                 </a:solidFill>
                 <a:latin typeface="Noto Sans KR"/>
               </a:rPr>
-              <a:t>10 / 11</a:t>
-            </a:r>
-          </a:p>
-        </p:txBody>
-      </p:sp>
-      <p:sp>
-        <p:nvSpPr>
-          <p:cNvPr id="6" name="Rectangle 5"/>
+              <a:t>10 / 12</a:t>
+            </a:r>
+          </a:p>
+        </p:txBody>
+      </p:sp>
+      <p:pic>
+        <p:nvPicPr>
+          <p:cNvPr id="6" name="Picture 5" descr="d4-plan.1768x616.png"/>
+          <p:cNvPicPr>
+            <a:picLocks noChangeAspect="1"/>
+          </p:cNvPicPr>
+          <p:nvPr/>
+        </p:nvPicPr>
+        <p:blipFill>
+          <a:blip r:embed="rId2"/>
+          <a:stretch>
+            <a:fillRect/>
+          </a:stretch>
+        </p:blipFill>
+        <p:spPr>
+          <a:xfrm>
+            <a:off x="482600" y="1270000"/>
+            <a:ext cx="11226800" cy="3911600"/>
+          </a:xfrm>
+          <a:prstGeom prst="rect">
+            <a:avLst/>
+          </a:prstGeom>
+        </p:spPr>
+      </p:pic>
+      <p:sp>
+        <p:nvSpPr>
+          <p:cNvPr id="7" name="TextBox 6"/>
+          <p:cNvSpPr txBox="1"/>
+          <p:nvPr/>
+        </p:nvSpPr>
+        <p:spPr>
+          <a:xfrm>
+            <a:off x="482600" y="5245100"/>
+            <a:ext cx="11226800" cy="215900"/>
+          </a:xfrm>
+          <a:prstGeom prst="rect">
+            <a:avLst/>
+          </a:prstGeom>
+          <a:noFill/>
+        </p:spPr>
+        <p:txBody>
+          <a:bodyPr wrap="square" lIns="0" rIns="0" tIns="0" bIns="0">
+            <a:spAutoFit/>
+          </a:bodyPr>
+          <a:lstStyle/>
+          <a:p>
+            <a:pPr>
+              <a:lnSpc>
+                <a:spcPct val="130000"/>
+              </a:lnSpc>
+              <a:spcAft>
+                <a:spcPts val="0"/>
+              </a:spcAft>
+            </a:pPr>
+            <a:r>
+              <a:rPr sz="850" b="0">
+                <a:solidFill>
+                  <a:srgbClr val="5C685F"/>
+                </a:solidFill>
+                <a:latin typeface="Noto Sans KR"/>
+              </a:rPr>
+              <a:t>본 도식은 A4AI 제조 진출의 3단계 실행 계획입니다</a:t>
+            </a:r>
+          </a:p>
+        </p:txBody>
+      </p:sp>
+      <p:sp>
+        <p:nvSpPr>
+          <p:cNvPr id="8" name="Rounded Rectangle 7"/>
           <p:cNvSpPr/>
           <p:nvPr/>
         </p:nvSpPr>
         <p:spPr>
           <a:xfrm>
-            <a:off x="482600" y="1270000"/>
-            <a:ext cx="11226800" cy="19050"/>
-          </a:xfrm>
-          <a:prstGeom prst="rect">
-            <a:avLst/>
+            <a:off x="482600" y="5588000"/>
+            <a:ext cx="11226800" cy="533399"/>
+          </a:xfrm>
+          <a:prstGeom prst="roundRect">
+            <a:avLst>
+              <a:gd name="adj" fmla="val 14285"/>
+            </a:avLst>
           </a:prstGeom>
           <a:solidFill>
-            <a:srgbClr val="8E3427"/>
+            <a:srgbClr val="F3DDD8"/>
           </a:solidFill>
           <a:ln>
             <a:noFill/>
@@ -3922,14 +3991,65 @@
       </p:sp>
       <p:sp>
         <p:nvSpPr>
-          <p:cNvPr id="7" name="TextBox 6"/>
+          <p:cNvPr id="9" name="TextBox 8"/>
           <p:cNvSpPr txBox="1"/>
           <p:nvPr/>
         </p:nvSpPr>
         <p:spPr>
           <a:xfrm>
-            <a:off x="482600" y="1409699"/>
-            <a:ext cx="11226800" cy="4000500"/>
+            <a:off x="685800" y="5588000"/>
+            <a:ext cx="10795000" cy="533399"/>
+          </a:xfrm>
+          <a:prstGeom prst="rect">
+            <a:avLst/>
+          </a:prstGeom>
+          <a:noFill/>
+        </p:spPr>
+        <p:txBody>
+          <a:bodyPr wrap="square" lIns="0" rIns="0" tIns="0" bIns="0" anchor="ctr">
+            <a:spAutoFit/>
+          </a:bodyPr>
+          <a:lstStyle/>
+          <a:p>
+            <a:pPr>
+              <a:lnSpc>
+                <a:spcPct val="130000"/>
+              </a:lnSpc>
+              <a:spcAft>
+                <a:spcPts val="0"/>
+              </a:spcAft>
+            </a:pPr>
+            <a:r>
+              <a:rPr sz="1400" b="1">
+                <a:solidFill>
+                  <a:srgbClr val="8E3427"/>
+                </a:solidFill>
+                <a:latin typeface="Noto Sans KR"/>
+              </a:rPr>
+              <a:t>핵심  </a:t>
+            </a:r>
+            <a:r>
+              <a:rPr sz="1400" b="0">
+                <a:solidFill>
+                  <a:srgbClr val="17201A"/>
+                </a:solidFill>
+                <a:latin typeface="Noto Sans KR"/>
+              </a:rPr>
+              <a:t>2단계에서 만든 제조 레퍼런스가 3단계 대형 사업의 입장권이 됩니다</a:t>
+            </a:r>
+          </a:p>
+        </p:txBody>
+      </p:sp>
+      <p:sp>
+        <p:nvSpPr>
+          <p:cNvPr id="10" name="TextBox 9"/>
+          <p:cNvSpPr txBox="1"/>
+          <p:nvPr/>
+        </p:nvSpPr>
+        <p:spPr>
+          <a:xfrm>
+            <a:off x="482600" y="6197600"/>
+            <a:ext cx="11226800" cy="190499"/>
           </a:xfrm>
           <a:prstGeom prst="rect">
             <a:avLst/>
@@ -3942,310 +4062,22 @@
           </a:bodyPr>
           <a:lstStyle/>
           <a:p>
-            <a:pPr marL="165100" indent="-165100">
-              <a:lnSpc>
-                <a:spcPct val="140000"/>
-              </a:lnSpc>
-              <a:spcAft>
-                <a:spcPts val="700"/>
+            <a:pPr>
+              <a:lnSpc>
+                <a:spcPct val="130000"/>
+              </a:lnSpc>
+              <a:spcAft>
+                <a:spcPts val="0"/>
               </a:spcAft>
             </a:pPr>
             <a:r>
               <a:rPr sz="800" b="0">
                 <a:solidFill>
-                  <a:srgbClr val="8E3427"/>
-                </a:solidFill>
-                <a:latin typeface="Noto Sans KR"/>
-              </a:rPr>
-              <a:t>■   </a:t>
-            </a:r>
-            <a:r>
-              <a:rPr sz="1400" b="0">
-                <a:solidFill>
-                  <a:srgbClr val="2C362F"/>
-                </a:solidFill>
-                <a:latin typeface="Noto Sans KR"/>
-              </a:rPr>
-              <a:t>공통 서류: 사업자등록증, 중소기업 확인서, 재무제표, 고용보험 명부</a:t>
-            </a:r>
-          </a:p>
-          <a:p>
-            <a:pPr marL="165100" indent="-165100">
-              <a:lnSpc>
-                <a:spcPct val="140000"/>
-              </a:lnSpc>
-              <a:spcAft>
-                <a:spcPts val="700"/>
-              </a:spcAft>
-            </a:pPr>
-            <a:r>
-              <a:rPr sz="800" b="0">
-                <a:solidFill>
-                  <a:srgbClr val="8E3427"/>
-                </a:solidFill>
-                <a:latin typeface="Noto Sans KR"/>
-              </a:rPr>
-              <a:t>■   </a:t>
-            </a:r>
-            <a:r>
-              <a:rPr sz="1400" b="0">
-                <a:solidFill>
-                  <a:srgbClr val="2C362F"/>
-                </a:solidFill>
-                <a:latin typeface="Noto Sans KR"/>
-              </a:rPr>
-              <a:t>앵커기업 미확보 → 원스톱 에이전트·경북TP에 매칭 요청</a:t>
-            </a:r>
-          </a:p>
-          <a:p>
-            <a:pPr marL="165100" indent="-165100">
-              <a:lnSpc>
-                <a:spcPct val="140000"/>
-              </a:lnSpc>
-              <a:spcAft>
-                <a:spcPts val="700"/>
-              </a:spcAft>
-            </a:pPr>
-            <a:r>
-              <a:rPr sz="800" b="0">
-                <a:solidFill>
-                  <a:srgbClr val="8E3427"/>
-                </a:solidFill>
-                <a:latin typeface="Noto Sans KR"/>
-              </a:rPr>
-              <a:t>■   </a:t>
-            </a:r>
-            <a:r>
-              <a:rPr sz="1400" b="0">
-                <a:solidFill>
-                  <a:srgbClr val="2C362F"/>
-                </a:solidFill>
-                <a:latin typeface="Noto Sans KR"/>
-              </a:rPr>
-              <a:t>민간부담금: K-AI 20% 이상, 지역거점 R&amp;D 25% 이상</a:t>
-            </a:r>
-          </a:p>
-          <a:p>
-            <a:pPr marL="165100" indent="-165100">
-              <a:lnSpc>
-                <a:spcPct val="140000"/>
-              </a:lnSpc>
-              <a:spcAft>
-                <a:spcPts val="700"/>
-              </a:spcAft>
-            </a:pPr>
-            <a:r>
-              <a:rPr sz="800" b="0">
-                <a:solidFill>
-                  <a:srgbClr val="8E3427"/>
-                </a:solidFill>
-                <a:latin typeface="Noto Sans KR"/>
-              </a:rPr>
-              <a:t>■   </a:t>
-            </a:r>
-            <a:r>
-              <a:rPr sz="1400" b="0">
-                <a:solidFill>
-                  <a:srgbClr val="2C362F"/>
-                </a:solidFill>
-                <a:latin typeface="Noto Sans KR"/>
-              </a:rPr>
-              <a:t>제조 실적 부족 → 기술지도·AX랩 실증으로 레퍼런스부터</a:t>
-            </a:r>
-          </a:p>
-          <a:p>
-            <a:pPr marL="165100" indent="-165100">
-              <a:lnSpc>
-                <a:spcPct val="140000"/>
-              </a:lnSpc>
-              <a:spcAft>
-                <a:spcPts val="700"/>
-              </a:spcAft>
-            </a:pPr>
-            <a:r>
-              <a:rPr sz="800" b="0">
-                <a:solidFill>
-                  <a:srgbClr val="8E3427"/>
-                </a:solidFill>
-                <a:latin typeface="Noto Sans KR"/>
-              </a:rPr>
-              <a:t>■   </a:t>
-            </a:r>
-            <a:r>
-              <a:rPr sz="1400" b="0">
-                <a:solidFill>
-                  <a:srgbClr val="2C362F"/>
-                </a:solidFill>
-                <a:latin typeface="Noto Sans KR"/>
-              </a:rPr>
-              <a:t>방산 보안·데이터 반출 우려 → 온디바이스(현장 안 처리)로 대응</a:t>
-            </a:r>
-          </a:p>
-          <a:p>
-            <a:pPr marL="165100" indent="-165100">
-              <a:lnSpc>
-                <a:spcPct val="140000"/>
-              </a:lnSpc>
-              <a:spcAft>
-                <a:spcPts val="700"/>
-              </a:spcAft>
-            </a:pPr>
-            <a:r>
-              <a:rPr sz="800" b="0">
-                <a:solidFill>
-                  <a:srgbClr val="8E3427"/>
-                </a:solidFill>
-                <a:latin typeface="Noto Sans KR"/>
-              </a:rPr>
-              <a:t>■   </a:t>
-            </a:r>
-            <a:r>
-              <a:rPr sz="1400" b="0">
-                <a:solidFill>
-                  <a:srgbClr val="2C362F"/>
-                </a:solidFill>
-                <a:latin typeface="Noto Sans KR"/>
-              </a:rPr>
-              <a:t>K-AI는 기업당 1개 과제만 → 앵커 후보 중 1곳에 집중</a:t>
-            </a:r>
-          </a:p>
-        </p:txBody>
-      </p:sp>
-      <p:sp>
-        <p:nvSpPr>
-          <p:cNvPr id="8" name="Rounded Rectangle 7"/>
-          <p:cNvSpPr/>
-          <p:nvPr/>
-        </p:nvSpPr>
-        <p:spPr>
-          <a:xfrm>
-            <a:off x="482600" y="5588000"/>
-            <a:ext cx="11226800" cy="533399"/>
-          </a:xfrm>
-          <a:prstGeom prst="roundRect">
-            <a:avLst>
-              <a:gd name="adj" fmla="val 14285"/>
-            </a:avLst>
-          </a:prstGeom>
-          <a:solidFill>
-            <a:srgbClr val="F3DDD8"/>
-          </a:solidFill>
-          <a:ln>
-            <a:noFill/>
-          </a:ln>
-          <a:effectLst/>
-        </p:spPr>
-        <p:style>
-          <a:lnRef idx="1">
-            <a:schemeClr val="accent1"/>
-          </a:lnRef>
-          <a:fillRef idx="3">
-            <a:schemeClr val="accent1"/>
-          </a:fillRef>
-          <a:effectRef idx="2">
-            <a:schemeClr val="accent1"/>
-          </a:effectRef>
-          <a:fontRef idx="minor">
-            <a:schemeClr val="lt1"/>
-          </a:fontRef>
-        </p:style>
-        <p:txBody>
-          <a:bodyPr rtlCol="0" anchor="ctr"/>
-          <a:lstStyle/>
-          <a:p>
-            <a:pPr algn="ctr"/>
-          </a:p>
-        </p:txBody>
-      </p:sp>
-      <p:sp>
-        <p:nvSpPr>
-          <p:cNvPr id="9" name="TextBox 8"/>
-          <p:cNvSpPr txBox="1"/>
-          <p:nvPr/>
-        </p:nvSpPr>
-        <p:spPr>
-          <a:xfrm>
-            <a:off x="685800" y="5588000"/>
-            <a:ext cx="10795000" cy="533399"/>
-          </a:xfrm>
-          <a:prstGeom prst="rect">
-            <a:avLst/>
-          </a:prstGeom>
-          <a:noFill/>
-        </p:spPr>
-        <p:txBody>
-          <a:bodyPr wrap="square" lIns="0" rIns="0" tIns="0" bIns="0" anchor="ctr">
-            <a:spAutoFit/>
-          </a:bodyPr>
-          <a:lstStyle/>
-          <a:p>
-            <a:pPr>
-              <a:lnSpc>
-                <a:spcPct val="130000"/>
-              </a:lnSpc>
-              <a:spcAft>
-                <a:spcPts val="0"/>
-              </a:spcAft>
-            </a:pPr>
-            <a:r>
-              <a:rPr sz="1400" b="1">
-                <a:solidFill>
-                  <a:srgbClr val="8E3427"/>
-                </a:solidFill>
-                <a:latin typeface="Noto Sans KR"/>
-              </a:rPr>
-              <a:t>핵심  </a:t>
-            </a:r>
-            <a:r>
-              <a:rPr sz="1400" b="0">
-                <a:solidFill>
-                  <a:srgbClr val="17201A"/>
-                </a:solidFill>
-                <a:latin typeface="Noto Sans KR"/>
-              </a:rPr>
-              <a:t>이번 주 할 일은 신청서 1건과 앵커 후보 3곳에 연락하는 것입니다</a:t>
-            </a:r>
-          </a:p>
-        </p:txBody>
-      </p:sp>
-      <p:sp>
-        <p:nvSpPr>
-          <p:cNvPr id="10" name="TextBox 9"/>
-          <p:cNvSpPr txBox="1"/>
-          <p:nvPr/>
-        </p:nvSpPr>
-        <p:spPr>
-          <a:xfrm>
-            <a:off x="482600" y="6197600"/>
-            <a:ext cx="11226800" cy="190499"/>
-          </a:xfrm>
-          <a:prstGeom prst="rect">
-            <a:avLst/>
-          </a:prstGeom>
-          <a:noFill/>
-        </p:spPr>
-        <p:txBody>
-          <a:bodyPr wrap="square" lIns="0" rIns="0" tIns="0" bIns="0">
-            <a:spAutoFit/>
-          </a:bodyPr>
-          <a:lstStyle/>
-          <a:p>
-            <a:pPr>
-              <a:lnSpc>
-                <a:spcPct val="130000"/>
-              </a:lnSpc>
-              <a:spcAft>
-                <a:spcPts val="0"/>
-              </a:spcAft>
-            </a:pPr>
-            <a:r>
-              <a:rPr sz="800" b="0">
-                <a:solidFill>
                   <a:srgbClr val="7D897F"/>
                 </a:solidFill>
                 <a:latin typeface="Noto Sans KR"/>
               </a:rPr>
-              <a:t>출처: K-AI 경북형 공고문, 지역거점 AX 혁신 기술개발 공고문(2026.10.13)</a:t>
+              <a:t>출처: 람 계획안 · 일정은 각 공고문 기준</a:t>
             </a:r>
           </a:p>
         </p:txBody>
@@ -4305,7 +4137,7 @@
                 </a:solidFill>
                 <a:latin typeface="Noto Sans KR"/>
               </a:rPr>
-              <a:t>지금 공급기업으로 제조에 들어가고, 10월 마감 4건부터 신청합시다</a:t>
+              <a:t>관건은 파트너이며, 민간부담금 20~25%를 미리 잡아야 합니다</a:t>
             </a:r>
           </a:p>
         </p:txBody>
@@ -4347,7 +4179,7 @@
                 </a:solidFill>
                 <a:latin typeface="Noto Sans KR"/>
               </a:rPr>
-              <a:t>판정: 추천</a:t>
+              <a:t>공고문 조건에서 확인한 준비물과 위험</a:t>
             </a:r>
           </a:p>
         </p:txBody>
@@ -4431,26 +4263,24 @@
                 </a:solidFill>
                 <a:latin typeface="Noto Sans KR"/>
               </a:rPr>
-              <a:t>11 / 11</a:t>
-            </a:r>
-          </a:p>
-        </p:txBody>
-      </p:sp>
-      <p:sp>
-        <p:nvSpPr>
-          <p:cNvPr id="6" name="Rounded Rectangle 5"/>
+              <a:t>11 / 12</a:t>
+            </a:r>
+          </a:p>
+        </p:txBody>
+      </p:sp>
+      <p:sp>
+        <p:nvSpPr>
+          <p:cNvPr id="6" name="Rectangle 5"/>
           <p:cNvSpPr/>
           <p:nvPr/>
         </p:nvSpPr>
         <p:spPr>
           <a:xfrm>
             <a:off x="482600" y="1270000"/>
-            <a:ext cx="1016000" cy="355599"/>
-          </a:xfrm>
-          <a:prstGeom prst="roundRect">
-            <a:avLst>
-              <a:gd name="adj" fmla="val 21428"/>
-            </a:avLst>
+            <a:ext cx="11226800" cy="19050"/>
+          </a:xfrm>
+          <a:prstGeom prst="rect">
+            <a:avLst/>
           </a:prstGeom>
           <a:solidFill>
             <a:srgbClr val="8E3427"/>
@@ -4479,34 +4309,218 @@
           <a:lstStyle/>
           <a:p>
             <a:pPr algn="ctr"/>
-            <a:r>
-              <a:rPr sz="1400" b="1">
-                <a:solidFill>
-                  <a:srgbClr val="FFFFFF"/>
-                </a:solidFill>
-                <a:latin typeface="Noto Sans KR"/>
-              </a:rPr>
-              <a:t>추천</a:t>
-            </a:r>
-          </a:p>
-        </p:txBody>
-      </p:sp>
-      <p:sp>
-        <p:nvSpPr>
-          <p:cNvPr id="7" name="Rectangle 6"/>
+          </a:p>
+        </p:txBody>
+      </p:sp>
+      <p:sp>
+        <p:nvSpPr>
+          <p:cNvPr id="7" name="TextBox 6"/>
+          <p:cNvSpPr txBox="1"/>
+          <p:nvPr/>
+        </p:nvSpPr>
+        <p:spPr>
+          <a:xfrm>
+            <a:off x="482600" y="1409699"/>
+            <a:ext cx="11226800" cy="4000500"/>
+          </a:xfrm>
+          <a:prstGeom prst="rect">
+            <a:avLst/>
+          </a:prstGeom>
+          <a:noFill/>
+        </p:spPr>
+        <p:txBody>
+          <a:bodyPr wrap="square" lIns="0" rIns="0" tIns="0" bIns="0">
+            <a:spAutoFit/>
+          </a:bodyPr>
+          <a:lstStyle/>
+          <a:p>
+            <a:pPr marL="165100" indent="-165100">
+              <a:lnSpc>
+                <a:spcPct val="140000"/>
+              </a:lnSpc>
+              <a:spcAft>
+                <a:spcPts val="700"/>
+              </a:spcAft>
+            </a:pPr>
+            <a:r>
+              <a:rPr sz="800" b="0">
+                <a:solidFill>
+                  <a:srgbClr val="8E3427"/>
+                </a:solidFill>
+                <a:latin typeface="Noto Sans KR"/>
+              </a:rPr>
+              <a:t>■   </a:t>
+            </a:r>
+            <a:r>
+              <a:rPr sz="1400" b="0">
+                <a:solidFill>
+                  <a:srgbClr val="2C362F"/>
+                </a:solidFill>
+                <a:latin typeface="Noto Sans KR"/>
+              </a:rPr>
+              <a:t>공통 서류: 사업자등록증, 중소기업 확인서, 재무제표, 고용보험 명부</a:t>
+            </a:r>
+          </a:p>
+          <a:p>
+            <a:pPr marL="165100" indent="-165100">
+              <a:lnSpc>
+                <a:spcPct val="140000"/>
+              </a:lnSpc>
+              <a:spcAft>
+                <a:spcPts val="700"/>
+              </a:spcAft>
+            </a:pPr>
+            <a:r>
+              <a:rPr sz="800" b="0">
+                <a:solidFill>
+                  <a:srgbClr val="8E3427"/>
+                </a:solidFill>
+                <a:latin typeface="Noto Sans KR"/>
+              </a:rPr>
+              <a:t>■   </a:t>
+            </a:r>
+            <a:r>
+              <a:rPr sz="1400" b="0">
+                <a:solidFill>
+                  <a:srgbClr val="2C362F"/>
+                </a:solidFill>
+                <a:latin typeface="Noto Sans KR"/>
+              </a:rPr>
+              <a:t>앵커기업 미확보 → 원스톱 에이전트·경북TP에 매칭 요청</a:t>
+            </a:r>
+          </a:p>
+          <a:p>
+            <a:pPr marL="165100" indent="-165100">
+              <a:lnSpc>
+                <a:spcPct val="140000"/>
+              </a:lnSpc>
+              <a:spcAft>
+                <a:spcPts val="700"/>
+              </a:spcAft>
+            </a:pPr>
+            <a:r>
+              <a:rPr sz="800" b="0">
+                <a:solidFill>
+                  <a:srgbClr val="8E3427"/>
+                </a:solidFill>
+                <a:latin typeface="Noto Sans KR"/>
+              </a:rPr>
+              <a:t>■   </a:t>
+            </a:r>
+            <a:r>
+              <a:rPr sz="1400" b="0">
+                <a:solidFill>
+                  <a:srgbClr val="2C362F"/>
+                </a:solidFill>
+                <a:latin typeface="Noto Sans KR"/>
+              </a:rPr>
+              <a:t>민간부담금: K-AI 20% 이상, 지역거점 R&amp;D 25% 이상</a:t>
+            </a:r>
+          </a:p>
+          <a:p>
+            <a:pPr marL="165100" indent="-165100">
+              <a:lnSpc>
+                <a:spcPct val="140000"/>
+              </a:lnSpc>
+              <a:spcAft>
+                <a:spcPts val="700"/>
+              </a:spcAft>
+            </a:pPr>
+            <a:r>
+              <a:rPr sz="800" b="0">
+                <a:solidFill>
+                  <a:srgbClr val="8E3427"/>
+                </a:solidFill>
+                <a:latin typeface="Noto Sans KR"/>
+              </a:rPr>
+              <a:t>■   </a:t>
+            </a:r>
+            <a:r>
+              <a:rPr sz="1400" b="0">
+                <a:solidFill>
+                  <a:srgbClr val="2C362F"/>
+                </a:solidFill>
+                <a:latin typeface="Noto Sans KR"/>
+              </a:rPr>
+              <a:t>제조 실적 부족 → 기술지도·AX랩 실증으로 레퍼런스부터</a:t>
+            </a:r>
+          </a:p>
+          <a:p>
+            <a:pPr marL="165100" indent="-165100">
+              <a:lnSpc>
+                <a:spcPct val="140000"/>
+              </a:lnSpc>
+              <a:spcAft>
+                <a:spcPts val="700"/>
+              </a:spcAft>
+            </a:pPr>
+            <a:r>
+              <a:rPr sz="800" b="0">
+                <a:solidFill>
+                  <a:srgbClr val="8E3427"/>
+                </a:solidFill>
+                <a:latin typeface="Noto Sans KR"/>
+              </a:rPr>
+              <a:t>■   </a:t>
+            </a:r>
+            <a:r>
+              <a:rPr sz="1400" b="0">
+                <a:solidFill>
+                  <a:srgbClr val="2C362F"/>
+                </a:solidFill>
+                <a:latin typeface="Noto Sans KR"/>
+              </a:rPr>
+              <a:t>방산 보안·데이터 반출 우려 → 온디바이스(현장 안 처리)로 대응</a:t>
+            </a:r>
+          </a:p>
+          <a:p>
+            <a:pPr marL="165100" indent="-165100">
+              <a:lnSpc>
+                <a:spcPct val="140000"/>
+              </a:lnSpc>
+              <a:spcAft>
+                <a:spcPts val="700"/>
+              </a:spcAft>
+            </a:pPr>
+            <a:r>
+              <a:rPr sz="800" b="0">
+                <a:solidFill>
+                  <a:srgbClr val="8E3427"/>
+                </a:solidFill>
+                <a:latin typeface="Noto Sans KR"/>
+              </a:rPr>
+              <a:t>■   </a:t>
+            </a:r>
+            <a:r>
+              <a:rPr sz="1400" b="0">
+                <a:solidFill>
+                  <a:srgbClr val="2C362F"/>
+                </a:solidFill>
+                <a:latin typeface="Noto Sans KR"/>
+              </a:rPr>
+              <a:t>K-AI는 기업당 1개 과제만 → 앵커 후보 중 1곳에 집중</a:t>
+            </a:r>
+          </a:p>
+        </p:txBody>
+      </p:sp>
+      <p:sp>
+        <p:nvSpPr>
+          <p:cNvPr id="8" name="Rounded Rectangle 7"/>
           <p:cNvSpPr/>
           <p:nvPr/>
         </p:nvSpPr>
         <p:spPr>
           <a:xfrm>
-            <a:off x="482600" y="1816099"/>
-            <a:ext cx="5549899" cy="19050"/>
-          </a:xfrm>
-          <a:prstGeom prst="rect">
-            <a:avLst/>
+            <a:off x="482600" y="5588000"/>
+            <a:ext cx="11226800" cy="533399"/>
+          </a:xfrm>
+          <a:prstGeom prst="roundRect">
+            <a:avLst>
+              <a:gd name="adj" fmla="val 14285"/>
+            </a:avLst>
           </a:prstGeom>
           <a:solidFill>
-            <a:srgbClr val="8E3427"/>
+            <a:srgbClr val="F3DDD8"/>
           </a:solidFill>
           <a:ln>
             <a:noFill/>
@@ -4537,14 +4551,65 @@
       </p:sp>
       <p:sp>
         <p:nvSpPr>
-          <p:cNvPr id="8" name="TextBox 7"/>
+          <p:cNvPr id="9" name="TextBox 8"/>
           <p:cNvSpPr txBox="1"/>
           <p:nvPr/>
         </p:nvSpPr>
         <p:spPr>
           <a:xfrm>
-            <a:off x="482600" y="1955800"/>
-            <a:ext cx="5549899" cy="317500"/>
+            <a:off x="685800" y="5588000"/>
+            <a:ext cx="10795000" cy="533399"/>
+          </a:xfrm>
+          <a:prstGeom prst="rect">
+            <a:avLst/>
+          </a:prstGeom>
+          <a:noFill/>
+        </p:spPr>
+        <p:txBody>
+          <a:bodyPr wrap="square" lIns="0" rIns="0" tIns="0" bIns="0" anchor="ctr">
+            <a:spAutoFit/>
+          </a:bodyPr>
+          <a:lstStyle/>
+          <a:p>
+            <a:pPr>
+              <a:lnSpc>
+                <a:spcPct val="130000"/>
+              </a:lnSpc>
+              <a:spcAft>
+                <a:spcPts val="0"/>
+              </a:spcAft>
+            </a:pPr>
+            <a:r>
+              <a:rPr sz="1400" b="1">
+                <a:solidFill>
+                  <a:srgbClr val="8E3427"/>
+                </a:solidFill>
+                <a:latin typeface="Noto Sans KR"/>
+              </a:rPr>
+              <a:t>핵심  </a:t>
+            </a:r>
+            <a:r>
+              <a:rPr sz="1400" b="0">
+                <a:solidFill>
+                  <a:srgbClr val="17201A"/>
+                </a:solidFill>
+                <a:latin typeface="Noto Sans KR"/>
+              </a:rPr>
+              <a:t>이번 주 할 일은 신청서 1건과 앵커 후보 3곳에 연락하는 것입니다</a:t>
+            </a:r>
+          </a:p>
+        </p:txBody>
+      </p:sp>
+      <p:sp>
+        <p:nvSpPr>
+          <p:cNvPr id="10" name="TextBox 9"/>
+          <p:cNvSpPr txBox="1"/>
+          <p:nvPr/>
+        </p:nvSpPr>
+        <p:spPr>
+          <a:xfrm>
+            <a:off x="482600" y="6197600"/>
+            <a:ext cx="11226800" cy="190499"/>
           </a:xfrm>
           <a:prstGeom prst="rect">
             <a:avLst/>
@@ -4566,27 +4631,45 @@
               </a:spcAft>
             </a:pPr>
             <a:r>
-              <a:rPr sz="1800" b="1">
-                <a:solidFill>
-                  <a:srgbClr val="17201A"/>
-                </a:solidFill>
-                <a:latin typeface="Noto Sans KR"/>
-              </a:rPr>
-              <a:t>근거</a:t>
-            </a:r>
-          </a:p>
-        </p:txBody>
-      </p:sp>
-      <p:sp>
-        <p:nvSpPr>
-          <p:cNvPr id="9" name="TextBox 8"/>
+              <a:rPr sz="800" b="0">
+                <a:solidFill>
+                  <a:srgbClr val="7D897F"/>
+                </a:solidFill>
+                <a:latin typeface="Noto Sans KR"/>
+              </a:rPr>
+              <a:t>출처: K-AI 경북형 공고문, 지역거점 AX 혁신 기술개발 공고문(2026.10.13)</a:t>
+            </a:r>
+          </a:p>
+        </p:txBody>
+      </p:sp>
+    </p:spTree>
+  </p:cSld>
+  <p:clrMapOvr>
+    <a:masterClrMapping/>
+  </p:clrMapOvr>
+</p:sld>
+</file>
+
+<file path=ppt/slides/slide12.xml><?xml version="1.0" encoding="utf-8"?>
+<p:sld xmlns:a="http://schemas.openxmlformats.org/drawingml/2006/main" xmlns:p="http://schemas.openxmlformats.org/presentationml/2006/main" xmlns:r="http://schemas.openxmlformats.org/officeDocument/2006/relationships">
+  <p:cSld>
+    <p:spTree>
+      <p:nvGrpSpPr>
+        <p:cNvPr id="1" name=""/>
+        <p:cNvGrpSpPr/>
+        <p:nvPr/>
+      </p:nvGrpSpPr>
+      <p:grpSpPr/>
+      <p:sp>
+        <p:nvSpPr>
+          <p:cNvPr id="2" name="TextBox 1"/>
           <p:cNvSpPr txBox="1"/>
           <p:nvPr/>
         </p:nvSpPr>
         <p:spPr>
           <a:xfrm>
-            <a:off x="482600" y="2374899"/>
-            <a:ext cx="5549899" cy="4343400"/>
+            <a:off x="482600" y="380999"/>
+            <a:ext cx="11226800" cy="444500"/>
           </a:xfrm>
           <a:prstGeom prst="rect">
             <a:avLst/>
@@ -4599,6 +4682,315 @@
           </a:bodyPr>
           <a:lstStyle/>
           <a:p>
+            <a:pPr>
+              <a:lnSpc>
+                <a:spcPct val="130000"/>
+              </a:lnSpc>
+              <a:spcAft>
+                <a:spcPts val="0"/>
+              </a:spcAft>
+            </a:pPr>
+            <a:r>
+              <a:rPr sz="2500" b="1">
+                <a:solidFill>
+                  <a:srgbClr val="17201A"/>
+                </a:solidFill>
+                <a:latin typeface="Noto Sans KR"/>
+              </a:rPr>
+              <a:t>지금 공급기업으로 제조에 들어가고, 10월 마감 4건부터 신청합시다</a:t>
+            </a:r>
+          </a:p>
+        </p:txBody>
+      </p:sp>
+      <p:sp>
+        <p:nvSpPr>
+          <p:cNvPr id="3" name="TextBox 2"/>
+          <p:cNvSpPr txBox="1"/>
+          <p:nvPr/>
+        </p:nvSpPr>
+        <p:spPr>
+          <a:xfrm>
+            <a:off x="482600" y="850899"/>
+            <a:ext cx="11226800" cy="228600"/>
+          </a:xfrm>
+          <a:prstGeom prst="rect">
+            <a:avLst/>
+          </a:prstGeom>
+          <a:noFill/>
+        </p:spPr>
+        <p:txBody>
+          <a:bodyPr wrap="square" lIns="0" rIns="0" tIns="0" bIns="0">
+            <a:spAutoFit/>
+          </a:bodyPr>
+          <a:lstStyle/>
+          <a:p>
+            <a:pPr>
+              <a:lnSpc>
+                <a:spcPct val="130000"/>
+              </a:lnSpc>
+              <a:spcAft>
+                <a:spcPts val="0"/>
+              </a:spcAft>
+            </a:pPr>
+            <a:r>
+              <a:rPr sz="1150" b="0">
+                <a:solidFill>
+                  <a:srgbClr val="5C685F"/>
+                </a:solidFill>
+                <a:latin typeface="Noto Sans KR"/>
+              </a:rPr>
+              <a:t>판정: 추천</a:t>
+            </a:r>
+          </a:p>
+        </p:txBody>
+      </p:sp>
+      <p:sp>
+        <p:nvSpPr>
+          <p:cNvPr id="4" name="TextBox 3"/>
+          <p:cNvSpPr txBox="1"/>
+          <p:nvPr/>
+        </p:nvSpPr>
+        <p:spPr>
+          <a:xfrm>
+            <a:off x="482600" y="6553199"/>
+            <a:ext cx="8890000" cy="152400"/>
+          </a:xfrm>
+          <a:prstGeom prst="rect">
+            <a:avLst/>
+          </a:prstGeom>
+          <a:noFill/>
+        </p:spPr>
+        <p:txBody>
+          <a:bodyPr wrap="square" lIns="0" rIns="0" tIns="0" bIns="0">
+            <a:spAutoFit/>
+          </a:bodyPr>
+          <a:lstStyle/>
+          <a:p>
+            <a:pPr>
+              <a:lnSpc>
+                <a:spcPct val="130000"/>
+              </a:lnSpc>
+              <a:spcAft>
+                <a:spcPts val="0"/>
+              </a:spcAft>
+            </a:pPr>
+            <a:r>
+              <a:rPr sz="750" b="0">
+                <a:solidFill>
+                  <a:srgbClr val="5C685F"/>
+                </a:solidFill>
+                <a:latin typeface="Noto Sans KR"/>
+              </a:rPr>
+              <a:t>EXP-1015-06 · A4AI 제조 진출 방안과 지금 잡을 지원사업</a:t>
+            </a:r>
+          </a:p>
+        </p:txBody>
+      </p:sp>
+      <p:sp>
+        <p:nvSpPr>
+          <p:cNvPr id="5" name="TextBox 4"/>
+          <p:cNvSpPr txBox="1"/>
+          <p:nvPr/>
+        </p:nvSpPr>
+        <p:spPr>
+          <a:xfrm>
+            <a:off x="10439400" y="6553199"/>
+            <a:ext cx="1270000" cy="152400"/>
+          </a:xfrm>
+          <a:prstGeom prst="rect">
+            <a:avLst/>
+          </a:prstGeom>
+          <a:noFill/>
+        </p:spPr>
+        <p:txBody>
+          <a:bodyPr wrap="square" lIns="0" rIns="0" tIns="0" bIns="0">
+            <a:spAutoFit/>
+          </a:bodyPr>
+          <a:lstStyle/>
+          <a:p>
+            <a:pPr algn="r">
+              <a:lnSpc>
+                <a:spcPct val="130000"/>
+              </a:lnSpc>
+              <a:spcAft>
+                <a:spcPts val="0"/>
+              </a:spcAft>
+            </a:pPr>
+            <a:r>
+              <a:rPr sz="750" b="0">
+                <a:solidFill>
+                  <a:srgbClr val="5C685F"/>
+                </a:solidFill>
+                <a:latin typeface="Noto Sans KR"/>
+              </a:rPr>
+              <a:t>12 / 12</a:t>
+            </a:r>
+          </a:p>
+        </p:txBody>
+      </p:sp>
+      <p:sp>
+        <p:nvSpPr>
+          <p:cNvPr id="6" name="Rounded Rectangle 5"/>
+          <p:cNvSpPr/>
+          <p:nvPr/>
+        </p:nvSpPr>
+        <p:spPr>
+          <a:xfrm>
+            <a:off x="482600" y="1270000"/>
+            <a:ext cx="1016000" cy="355599"/>
+          </a:xfrm>
+          <a:prstGeom prst="roundRect">
+            <a:avLst>
+              <a:gd name="adj" fmla="val 21428"/>
+            </a:avLst>
+          </a:prstGeom>
+          <a:solidFill>
+            <a:srgbClr val="8E3427"/>
+          </a:solidFill>
+          <a:ln>
+            <a:noFill/>
+          </a:ln>
+          <a:effectLst/>
+        </p:spPr>
+        <p:style>
+          <a:lnRef idx="1">
+            <a:schemeClr val="accent1"/>
+          </a:lnRef>
+          <a:fillRef idx="3">
+            <a:schemeClr val="accent1"/>
+          </a:fillRef>
+          <a:effectRef idx="2">
+            <a:schemeClr val="accent1"/>
+          </a:effectRef>
+          <a:fontRef idx="minor">
+            <a:schemeClr val="lt1"/>
+          </a:fontRef>
+        </p:style>
+        <p:txBody>
+          <a:bodyPr rtlCol="0" anchor="ctr"/>
+          <a:lstStyle/>
+          <a:p>
+            <a:pPr algn="ctr"/>
+            <a:r>
+              <a:rPr sz="1400" b="1">
+                <a:solidFill>
+                  <a:srgbClr val="FFFFFF"/>
+                </a:solidFill>
+                <a:latin typeface="Noto Sans KR"/>
+              </a:rPr>
+              <a:t>추천</a:t>
+            </a:r>
+          </a:p>
+        </p:txBody>
+      </p:sp>
+      <p:sp>
+        <p:nvSpPr>
+          <p:cNvPr id="7" name="Rectangle 6"/>
+          <p:cNvSpPr/>
+          <p:nvPr/>
+        </p:nvSpPr>
+        <p:spPr>
+          <a:xfrm>
+            <a:off x="482600" y="1816099"/>
+            <a:ext cx="5549899" cy="19050"/>
+          </a:xfrm>
+          <a:prstGeom prst="rect">
+            <a:avLst/>
+          </a:prstGeom>
+          <a:solidFill>
+            <a:srgbClr val="8E3427"/>
+          </a:solidFill>
+          <a:ln>
+            <a:noFill/>
+          </a:ln>
+          <a:effectLst/>
+        </p:spPr>
+        <p:style>
+          <a:lnRef idx="1">
+            <a:schemeClr val="accent1"/>
+          </a:lnRef>
+          <a:fillRef idx="3">
+            <a:schemeClr val="accent1"/>
+          </a:fillRef>
+          <a:effectRef idx="2">
+            <a:schemeClr val="accent1"/>
+          </a:effectRef>
+          <a:fontRef idx="minor">
+            <a:schemeClr val="lt1"/>
+          </a:fontRef>
+        </p:style>
+        <p:txBody>
+          <a:bodyPr rtlCol="0" anchor="ctr"/>
+          <a:lstStyle/>
+          <a:p>
+            <a:pPr algn="ctr"/>
+          </a:p>
+        </p:txBody>
+      </p:sp>
+      <p:sp>
+        <p:nvSpPr>
+          <p:cNvPr id="8" name="TextBox 7"/>
+          <p:cNvSpPr txBox="1"/>
+          <p:nvPr/>
+        </p:nvSpPr>
+        <p:spPr>
+          <a:xfrm>
+            <a:off x="482600" y="1955800"/>
+            <a:ext cx="5549899" cy="317500"/>
+          </a:xfrm>
+          <a:prstGeom prst="rect">
+            <a:avLst/>
+          </a:prstGeom>
+          <a:noFill/>
+        </p:spPr>
+        <p:txBody>
+          <a:bodyPr wrap="square" lIns="0" rIns="0" tIns="0" bIns="0">
+            <a:spAutoFit/>
+          </a:bodyPr>
+          <a:lstStyle/>
+          <a:p>
+            <a:pPr>
+              <a:lnSpc>
+                <a:spcPct val="130000"/>
+              </a:lnSpc>
+              <a:spcAft>
+                <a:spcPts val="0"/>
+              </a:spcAft>
+            </a:pPr>
+            <a:r>
+              <a:rPr sz="1800" b="1">
+                <a:solidFill>
+                  <a:srgbClr val="17201A"/>
+                </a:solidFill>
+                <a:latin typeface="Noto Sans KR"/>
+              </a:rPr>
+              <a:t>근거</a:t>
+            </a:r>
+          </a:p>
+        </p:txBody>
+      </p:sp>
+      <p:sp>
+        <p:nvSpPr>
+          <p:cNvPr id="9" name="TextBox 8"/>
+          <p:cNvSpPr txBox="1"/>
+          <p:nvPr/>
+        </p:nvSpPr>
+        <p:spPr>
+          <a:xfrm>
+            <a:off x="482600" y="2374899"/>
+            <a:ext cx="5549899" cy="4343400"/>
+          </a:xfrm>
+          <a:prstGeom prst="rect">
+            <a:avLst/>
+          </a:prstGeom>
+          <a:noFill/>
+        </p:spPr>
+        <p:txBody>
+          <a:bodyPr wrap="square" lIns="0" rIns="0" tIns="0" bIns="0">
+            <a:spAutoFit/>
+          </a:bodyPr>
+          <a:lstStyle/>
+          <a:p>
             <a:pPr marL="165100" indent="-165100">
               <a:lnSpc>
                 <a:spcPct val="140000"/>
@@ -4699,7 +5091,7 @@
                 </a:solidFill>
                 <a:latin typeface="Noto Sans KR"/>
               </a:rPr>
-              <a:t>공장 없이도 공급기업 + 음성·온디바이스로 차별화할 수 있음</a:t>
+              <a:t>공장 없이도 공급기업 + 음성 작업기록 도우미로 차별화할 수 있음</a:t>
             </a:r>
             <a:br/>
             <a:r>
@@ -4709,7 +5101,7 @@
                 </a:solidFill>
                 <a:latin typeface="Noto Sans KR"/>
               </a:rPr>
-              <a:t>(근거: 8번)</a:t>
+              <a:t>(근거: 8번, 9번)</a:t>
             </a:r>
           </a:p>
           <a:p>
@@ -4747,7 +5139,7 @@
                 </a:solidFill>
                 <a:latin typeface="Noto Sans KR"/>
               </a:rPr>
-              <a:t>9번)</a:t>
+              <a:t>10번)</a:t>
             </a:r>
           </a:p>
         </p:txBody>
@@ -5126,7 +5518,7 @@
                 </a:solidFill>
                 <a:latin typeface="Noto Sans KR"/>
               </a:rPr>
-              <a:t>2 / 11</a:t>
+              <a:t>2 / 12</a:t>
             </a:r>
           </a:p>
         </p:txBody>
@@ -5714,7 +6106,7 @@
                 </a:solidFill>
                 <a:latin typeface="Noto Sans KR"/>
               </a:rPr>
-              <a:t>10월에 문을 열고, 내년 4월까지 실적을 만든 뒤 넓힙니다</a:t>
+              <a:t>첫 제품은 '현장 음성 작업기록 도우미'로 좁혀 실증합니다</a:t>
             </a:r>
           </a:p>
         </p:txBody>
@@ -5798,7 +6190,7 @@
                 </a:solidFill>
                 <a:latin typeface="Noto Sans KR"/>
               </a:rPr>
-              <a:t>관건은 파트너이며, 민간부담금 20~25%를 미리 잡아야 합니다</a:t>
+              <a:t>10월에 문을 열고, 내년 4월까지 실적을 만든 뒤 넓힙니다</a:t>
             </a:r>
           </a:p>
         </p:txBody>
@@ -5854,6 +6246,90 @@
         <p:spPr>
           <a:xfrm>
             <a:off x="1117600" y="5016500"/>
+            <a:ext cx="10160000" cy="380999"/>
+          </a:xfrm>
+          <a:prstGeom prst="rect">
+            <a:avLst/>
+          </a:prstGeom>
+          <a:noFill/>
+        </p:spPr>
+        <p:txBody>
+          <a:bodyPr wrap="square" lIns="0" rIns="0" tIns="0" bIns="0">
+            <a:spAutoFit/>
+          </a:bodyPr>
+          <a:lstStyle/>
+          <a:p>
+            <a:pPr>
+              <a:lnSpc>
+                <a:spcPct val="130000"/>
+              </a:lnSpc>
+              <a:spcAft>
+                <a:spcPts val="0"/>
+              </a:spcAft>
+            </a:pPr>
+            <a:r>
+              <a:rPr sz="1500" b="1">
+                <a:solidFill>
+                  <a:srgbClr val="17201A"/>
+                </a:solidFill>
+                <a:latin typeface="Noto Sans KR"/>
+              </a:rPr>
+              <a:t>관건은 파트너이며, 민간부담금 20~25%를 미리 잡아야 합니다</a:t>
+            </a:r>
+          </a:p>
+        </p:txBody>
+      </p:sp>
+      <p:sp>
+        <p:nvSpPr>
+          <p:cNvPr id="24" name="TextBox 23"/>
+          <p:cNvSpPr txBox="1"/>
+          <p:nvPr/>
+        </p:nvSpPr>
+        <p:spPr>
+          <a:xfrm>
+            <a:off x="482600" y="5422900"/>
+            <a:ext cx="571500" cy="380999"/>
+          </a:xfrm>
+          <a:prstGeom prst="rect">
+            <a:avLst/>
+          </a:prstGeom>
+          <a:noFill/>
+        </p:spPr>
+        <p:txBody>
+          <a:bodyPr wrap="square" lIns="0" rIns="0" tIns="0" bIns="0">
+            <a:spAutoFit/>
+          </a:bodyPr>
+          <a:lstStyle/>
+          <a:p>
+            <a:pPr>
+              <a:lnSpc>
+                <a:spcPct val="130000"/>
+              </a:lnSpc>
+              <a:spcAft>
+                <a:spcPts val="0"/>
+              </a:spcAft>
+            </a:pPr>
+            <a:r>
+              <a:rPr sz="2000" b="1">
+                <a:solidFill>
+                  <a:srgbClr val="D9971E"/>
+                </a:solidFill>
+                <a:latin typeface="Noto Sans KR"/>
+              </a:rPr>
+              <a:t>12</a:t>
+            </a:r>
+          </a:p>
+        </p:txBody>
+      </p:sp>
+      <p:sp>
+        <p:nvSpPr>
+          <p:cNvPr id="25" name="TextBox 24"/>
+          <p:cNvSpPr txBox="1"/>
+          <p:nvPr/>
+        </p:nvSpPr>
+        <p:spPr>
+          <a:xfrm>
+            <a:off x="1117600" y="5461000"/>
             <a:ext cx="10160000" cy="380999"/>
           </a:xfrm>
           <a:prstGeom prst="rect">
@@ -6068,7 +6544,7 @@
                 </a:solidFill>
                 <a:latin typeface="Noto Sans KR"/>
               </a:rPr>
-              <a:t>3 / 11</a:t>
+              <a:t>3 / 12</a:t>
             </a:r>
           </a:p>
         </p:txBody>
@@ -6758,7 +7234,7 @@
                 </a:solidFill>
                 <a:latin typeface="Noto Sans KR"/>
               </a:rPr>
-              <a:t>4 / 11</a:t>
+              <a:t>4 / 12</a:t>
             </a:r>
           </a:p>
         </p:txBody>
@@ -7406,7 +7882,7 @@
                 </a:solidFill>
                 <a:latin typeface="Noto Sans KR"/>
               </a:rPr>
-              <a:t>5 / 11</a:t>
+              <a:t>5 / 12</a:t>
             </a:r>
           </a:p>
         </p:txBody>
@@ -8080,7 +8556,7 @@
                 </a:solidFill>
                 <a:latin typeface="Noto Sans KR"/>
               </a:rPr>
-              <a:t>6 / 11</a:t>
+              <a:t>6 / 12</a:t>
             </a:r>
           </a:p>
         </p:txBody>
@@ -8764,7 +9240,7 @@
                 </a:solidFill>
                 <a:latin typeface="Noto Sans KR"/>
               </a:rPr>
-              <a:t>7 / 11</a:t>
+              <a:t>7 / 12</a:t>
             </a:r>
           </a:p>
         </p:txBody>
@@ -9155,7 +9631,7 @@
                 </a:solidFill>
                 <a:latin typeface="Noto Sans KR"/>
               </a:rPr>
-              <a:t>8 / 11</a:t>
+              <a:t>8 / 12</a:t>
             </a:r>
           </a:p>
         </p:txBody>
@@ -9677,7 +10153,7 @@
                 </a:solidFill>
                 <a:latin typeface="Noto Sans KR"/>
               </a:rPr>
-              <a:t>10월에 문을 열고, 내년 4월까지 실적을 만든 뒤 넓힙니다</a:t>
+              <a:t>첫 제품은 '현장 음성 작업기록 도우미'로 좁혀 실증합니다</a:t>
             </a:r>
           </a:p>
         </p:txBody>
@@ -9719,7 +10195,7 @@
                 </a:solidFill>
                 <a:latin typeface="Noto Sans KR"/>
               </a:rPr>
-              <a:t>각 단계의 할 일을 공고 마감일에 맞췄습니다</a:t>
+              <a:t>렘의 제안 · 제품 제안이며, 이미 구축했거나 검증한 성과가 아닙니다</a:t>
             </a:r>
           </a:p>
         </p:txBody>
@@ -9803,95 +10279,27 @@
                 </a:solidFill>
                 <a:latin typeface="Noto Sans KR"/>
               </a:rPr>
-              <a:t>9 / 11</a:t>
-            </a:r>
-          </a:p>
-        </p:txBody>
-      </p:sp>
-      <p:pic>
-        <p:nvPicPr>
-          <p:cNvPr id="6" name="Picture 5" descr="d4-plan.1768x616.png"/>
-          <p:cNvPicPr>
-            <a:picLocks noChangeAspect="1"/>
-          </p:cNvPicPr>
-          <p:nvPr/>
-        </p:nvPicPr>
-        <p:blipFill>
-          <a:blip r:embed="rId2"/>
-          <a:stretch>
-            <a:fillRect/>
-          </a:stretch>
-        </p:blipFill>
+              <a:t>9 / 12</a:t>
+            </a:r>
+          </a:p>
+        </p:txBody>
+      </p:sp>
+      <p:sp>
+        <p:nvSpPr>
+          <p:cNvPr id="6" name="Rectangle 5"/>
+          <p:cNvSpPr/>
+          <p:nvPr/>
+        </p:nvSpPr>
         <p:spPr>
           <a:xfrm>
             <a:off x="482600" y="1270000"/>
-            <a:ext cx="11226800" cy="3911600"/>
-          </a:xfrm>
-          <a:prstGeom prst="rect">
-            <a:avLst/>
-          </a:prstGeom>
-        </p:spPr>
-      </p:pic>
-      <p:sp>
-        <p:nvSpPr>
-          <p:cNvPr id="7" name="TextBox 6"/>
-          <p:cNvSpPr txBox="1"/>
-          <p:nvPr/>
-        </p:nvSpPr>
-        <p:spPr>
-          <a:xfrm>
-            <a:off x="482600" y="5245100"/>
-            <a:ext cx="11226800" cy="215900"/>
-          </a:xfrm>
-          <a:prstGeom prst="rect">
-            <a:avLst/>
-          </a:prstGeom>
-          <a:noFill/>
-        </p:spPr>
-        <p:txBody>
-          <a:bodyPr wrap="square" lIns="0" rIns="0" tIns="0" bIns="0">
-            <a:spAutoFit/>
-          </a:bodyPr>
-          <a:lstStyle/>
-          <a:p>
-            <a:pPr>
-              <a:lnSpc>
-                <a:spcPct val="130000"/>
-              </a:lnSpc>
-              <a:spcAft>
-                <a:spcPts val="0"/>
-              </a:spcAft>
-            </a:pPr>
-            <a:r>
-              <a:rPr sz="850" b="0">
-                <a:solidFill>
-                  <a:srgbClr val="5C685F"/>
-                </a:solidFill>
-                <a:latin typeface="Noto Sans KR"/>
-              </a:rPr>
-              <a:t>본 도식은 A4AI 제조 진출의 3단계 실행 계획입니다</a:t>
-            </a:r>
-          </a:p>
-        </p:txBody>
-      </p:sp>
-      <p:sp>
-        <p:nvSpPr>
-          <p:cNvPr id="8" name="Rounded Rectangle 7"/>
-          <p:cNvSpPr/>
-          <p:nvPr/>
-        </p:nvSpPr>
-        <p:spPr>
-          <a:xfrm>
-            <a:off x="482600" y="5588000"/>
-            <a:ext cx="11226800" cy="533399"/>
-          </a:xfrm>
-          <a:prstGeom prst="roundRect">
-            <a:avLst>
-              <a:gd name="adj" fmla="val 14285"/>
-            </a:avLst>
+            <a:ext cx="4445000" cy="19050"/>
+          </a:xfrm>
+          <a:prstGeom prst="rect">
+            <a:avLst/>
           </a:prstGeom>
           <a:solidFill>
-            <a:srgbClr val="F3DDD8"/>
+            <a:srgbClr val="8E3427"/>
           </a:solidFill>
           <a:ln>
             <a:noFill/>
@@ -9922,7 +10330,332 @@
       </p:sp>
       <p:sp>
         <p:nvSpPr>
+          <p:cNvPr id="7" name="TextBox 6"/>
+          <p:cNvSpPr txBox="1"/>
+          <p:nvPr/>
+        </p:nvSpPr>
+        <p:spPr>
+          <a:xfrm>
+            <a:off x="482600" y="1409699"/>
+            <a:ext cx="4445000" cy="4000500"/>
+          </a:xfrm>
+          <a:prstGeom prst="rect">
+            <a:avLst/>
+          </a:prstGeom>
+          <a:noFill/>
+        </p:spPr>
+        <p:txBody>
+          <a:bodyPr wrap="square" lIns="0" rIns="0" tIns="0" bIns="0">
+            <a:spAutoFit/>
+          </a:bodyPr>
+          <a:lstStyle/>
+          <a:p>
+            <a:pPr marL="165100" indent="-165100">
+              <a:lnSpc>
+                <a:spcPct val="140000"/>
+              </a:lnSpc>
+              <a:spcAft>
+                <a:spcPts val="700"/>
+              </a:spcAft>
+            </a:pPr>
+            <a:r>
+              <a:rPr sz="800" b="0">
+                <a:solidFill>
+                  <a:srgbClr val="8E3427"/>
+                </a:solidFill>
+                <a:latin typeface="Noto Sans KR"/>
+              </a:rPr>
+              <a:t>■   </a:t>
+            </a:r>
+            <a:r>
+              <a:rPr sz="1400" b="0">
+                <a:solidFill>
+                  <a:srgbClr val="2C362F"/>
+                </a:solidFill>
+                <a:latin typeface="Noto Sans KR"/>
+              </a:rPr>
+              <a:t>작업자가 말로 남긴 작업·점검 결과를 로컬 AI가</a:t>
+            </a:r>
+            <a:br/>
+            <a:r>
+              <a:rPr sz="1400" b="0">
+                <a:solidFill>
+                  <a:srgbClr val="2C362F"/>
+                </a:solidFill>
+                <a:latin typeface="Noto Sans KR"/>
+              </a:rPr>
+              <a:t>받아 적고 항목을 채움</a:t>
+            </a:r>
+          </a:p>
+          <a:p>
+            <a:pPr marL="165100" indent="-165100">
+              <a:lnSpc>
+                <a:spcPct val="140000"/>
+              </a:lnSpc>
+              <a:spcAft>
+                <a:spcPts val="700"/>
+              </a:spcAft>
+            </a:pPr>
+            <a:r>
+              <a:rPr sz="800" b="0">
+                <a:solidFill>
+                  <a:srgbClr val="8E3427"/>
+                </a:solidFill>
+                <a:latin typeface="Noto Sans KR"/>
+              </a:rPr>
+              <a:t>■   </a:t>
+            </a:r>
+            <a:r>
+              <a:rPr sz="1400" b="0">
+                <a:solidFill>
+                  <a:srgbClr val="2C362F"/>
+                </a:solidFill>
+                <a:latin typeface="Noto Sans KR"/>
+              </a:rPr>
+              <a:t>담당자가 원문과 대조해 승인한 뒤 MES·업무</a:t>
+            </a:r>
+            <a:br/>
+            <a:r>
+              <a:rPr sz="1400" b="0">
+                <a:solidFill>
+                  <a:srgbClr val="2C362F"/>
+                </a:solidFill>
+                <a:latin typeface="Noto Sans KR"/>
+              </a:rPr>
+              <a:t>시스템에 기록</a:t>
+            </a:r>
+          </a:p>
+          <a:p>
+            <a:pPr marL="165100" indent="-165100">
+              <a:lnSpc>
+                <a:spcPct val="140000"/>
+              </a:lnSpc>
+              <a:spcAft>
+                <a:spcPts val="700"/>
+              </a:spcAft>
+            </a:pPr>
+            <a:r>
+              <a:rPr sz="800" b="0">
+                <a:solidFill>
+                  <a:srgbClr val="8E3427"/>
+                </a:solidFill>
+                <a:latin typeface="Noto Sans KR"/>
+              </a:rPr>
+              <a:t>■   </a:t>
+            </a:r>
+            <a:r>
+              <a:rPr sz="1400" b="0">
+                <a:solidFill>
+                  <a:srgbClr val="2C362F"/>
+                </a:solidFill>
+                <a:latin typeface="Noto Sans KR"/>
+              </a:rPr>
+              <a:t>설비 제어 명령(PLC·로봇) 자동화는 이번 범위에서</a:t>
+            </a:r>
+            <a:br/>
+            <a:r>
+              <a:rPr sz="1400" b="0">
+                <a:solidFill>
+                  <a:srgbClr val="2C362F"/>
+                </a:solidFill>
+                <a:latin typeface="Noto Sans KR"/>
+              </a:rPr>
+              <a:t>제외</a:t>
+            </a:r>
+          </a:p>
+          <a:p>
+            <a:pPr marL="165100" indent="-165100">
+              <a:lnSpc>
+                <a:spcPct val="140000"/>
+              </a:lnSpc>
+              <a:spcAft>
+                <a:spcPts val="700"/>
+              </a:spcAft>
+            </a:pPr>
+            <a:r>
+              <a:rPr sz="800" b="0">
+                <a:solidFill>
+                  <a:srgbClr val="8E3427"/>
+                </a:solidFill>
+                <a:latin typeface="Noto Sans KR"/>
+              </a:rPr>
+              <a:t>■   </a:t>
+            </a:r>
+            <a:r>
+              <a:rPr sz="1400" b="0">
+                <a:solidFill>
+                  <a:srgbClr val="2C362F"/>
+                </a:solidFill>
+                <a:latin typeface="Noto Sans KR"/>
+              </a:rPr>
+              <a:t>실증 목표(계획치): 정확도 95% 이상, 기록 시간</a:t>
+            </a:r>
+            <a:br/>
+            <a:r>
+              <a:rPr sz="1400" b="0">
+                <a:solidFill>
+                  <a:srgbClr val="2C362F"/>
+                </a:solidFill>
+                <a:latin typeface="Noto Sans KR"/>
+              </a:rPr>
+              <a:t>30% 단축</a:t>
+            </a:r>
+          </a:p>
+          <a:p>
+            <a:pPr marL="165100" indent="-165100">
+              <a:lnSpc>
+                <a:spcPct val="140000"/>
+              </a:lnSpc>
+              <a:spcAft>
+                <a:spcPts val="700"/>
+              </a:spcAft>
+            </a:pPr>
+            <a:r>
+              <a:rPr sz="800" b="0">
+                <a:solidFill>
+                  <a:srgbClr val="8E3427"/>
+                </a:solidFill>
+                <a:latin typeface="Noto Sans KR"/>
+              </a:rPr>
+              <a:t>■   </a:t>
+            </a:r>
+            <a:r>
+              <a:rPr sz="1400" b="0">
+                <a:solidFill>
+                  <a:srgbClr val="2C362F"/>
+                </a:solidFill>
+                <a:latin typeface="Noto Sans KR"/>
+              </a:rPr>
+              <a:t>K-AI 공고의 과제 예시(비정형 데이터를 표준</a:t>
+            </a:r>
+            <a:br/>
+            <a:r>
+              <a:rPr sz="1400" b="0">
+                <a:solidFill>
+                  <a:srgbClr val="2C362F"/>
+                </a:solidFill>
+                <a:latin typeface="Noto Sans KR"/>
+              </a:rPr>
+              <a:t>데이터로)와 맞닿음</a:t>
+            </a:r>
+          </a:p>
+        </p:txBody>
+      </p:sp>
+      <p:pic>
+        <p:nvPicPr>
+          <p:cNvPr id="8" name="Picture 7" descr="d5-product.1028x616.png"/>
+          <p:cNvPicPr>
+            <a:picLocks noChangeAspect="1"/>
+          </p:cNvPicPr>
+          <p:nvPr/>
+        </p:nvPicPr>
+        <p:blipFill>
+          <a:blip r:embed="rId2"/>
+          <a:stretch>
+            <a:fillRect/>
+          </a:stretch>
+        </p:blipFill>
+        <p:spPr>
+          <a:xfrm>
+            <a:off x="5181599" y="1270000"/>
+            <a:ext cx="6527800" cy="3911600"/>
+          </a:xfrm>
+          <a:prstGeom prst="rect">
+            <a:avLst/>
+          </a:prstGeom>
+        </p:spPr>
+      </p:pic>
+      <p:sp>
+        <p:nvSpPr>
           <p:cNvPr id="9" name="TextBox 8"/>
+          <p:cNvSpPr txBox="1"/>
+          <p:nvPr/>
+        </p:nvSpPr>
+        <p:spPr>
+          <a:xfrm>
+            <a:off x="5181599" y="5245100"/>
+            <a:ext cx="6527800" cy="215900"/>
+          </a:xfrm>
+          <a:prstGeom prst="rect">
+            <a:avLst/>
+          </a:prstGeom>
+          <a:noFill/>
+        </p:spPr>
+        <p:txBody>
+          <a:bodyPr wrap="square" lIns="0" rIns="0" tIns="0" bIns="0">
+            <a:spAutoFit/>
+          </a:bodyPr>
+          <a:lstStyle/>
+          <a:p>
+            <a:pPr>
+              <a:lnSpc>
+                <a:spcPct val="130000"/>
+              </a:lnSpc>
+              <a:spcAft>
+                <a:spcPts val="0"/>
+              </a:spcAft>
+            </a:pPr>
+            <a:r>
+              <a:rPr sz="850" b="0">
+                <a:solidFill>
+                  <a:srgbClr val="5C685F"/>
+                </a:solidFill>
+                <a:latin typeface="Noto Sans KR"/>
+              </a:rPr>
+              <a:t>본 도식은 첫 제품 제안인 현장 음성 작업기록 도우미의 처리 흐름과 실증 목표입니다</a:t>
+            </a:r>
+          </a:p>
+        </p:txBody>
+      </p:sp>
+      <p:sp>
+        <p:nvSpPr>
+          <p:cNvPr id="10" name="Rounded Rectangle 9"/>
+          <p:cNvSpPr/>
+          <p:nvPr/>
+        </p:nvSpPr>
+        <p:spPr>
+          <a:xfrm>
+            <a:off x="482600" y="5588000"/>
+            <a:ext cx="11226800" cy="533399"/>
+          </a:xfrm>
+          <a:prstGeom prst="roundRect">
+            <a:avLst>
+              <a:gd name="adj" fmla="val 14285"/>
+            </a:avLst>
+          </a:prstGeom>
+          <a:solidFill>
+            <a:srgbClr val="F3DDD8"/>
+          </a:solidFill>
+          <a:ln>
+            <a:noFill/>
+          </a:ln>
+          <a:effectLst/>
+        </p:spPr>
+        <p:style>
+          <a:lnRef idx="1">
+            <a:schemeClr val="accent1"/>
+          </a:lnRef>
+          <a:fillRef idx="3">
+            <a:schemeClr val="accent1"/>
+          </a:fillRef>
+          <a:effectRef idx="2">
+            <a:schemeClr val="accent1"/>
+          </a:effectRef>
+          <a:fontRef idx="minor">
+            <a:schemeClr val="lt1"/>
+          </a:fontRef>
+        </p:style>
+        <p:txBody>
+          <a:bodyPr rtlCol="0" anchor="ctr"/>
+          <a:lstStyle/>
+          <a:p>
+            <a:pPr algn="ctr"/>
+          </a:p>
+        </p:txBody>
+      </p:sp>
+      <p:sp>
+        <p:nvSpPr>
+          <p:cNvPr id="11" name="TextBox 10"/>
           <p:cNvSpPr txBox="1"/>
           <p:nvPr/>
         </p:nvSpPr>
@@ -9966,14 +10699,14 @@
                 </a:solidFill>
                 <a:latin typeface="Noto Sans KR"/>
               </a:rPr>
-              <a:t>2단계에서 만든 제조 레퍼런스가 3단계 대형 사업의 입장권이 됩니다</a:t>
-            </a:r>
-          </a:p>
-        </p:txBody>
-      </p:sp>
-      <p:sp>
-        <p:nvSpPr>
-          <p:cNvPr id="10" name="TextBox 9"/>
+              <a:t>사람이 승인하는 기록 업무부터 시작해야 현장이 받아들이고, 실적도 빨리 쌓입니다</a:t>
+            </a:r>
+          </a:p>
+        </p:txBody>
+      </p:sp>
+      <p:sp>
+        <p:nvSpPr>
+          <p:cNvPr id="12" name="TextBox 11"/>
           <p:cNvSpPr txBox="1"/>
           <p:nvPr/>
         </p:nvSpPr>
@@ -10008,7 +10741,7 @@
                 </a:solidFill>
                 <a:latin typeface="Noto Sans KR"/>
               </a:rPr>
-              <a:t>출처: 람 계획안 · 일정은 각 공고문 기준</a:t>
+              <a:t>출처: 렘 제안(EXP-1015-06) · K-AI 경북형 공고문 p.3 과제 예시</a:t>
             </a:r>
           </a:p>
         </p:txBody>
